--- a/slides/pptx/lecture11_unsupervised.pptx
+++ b/slides/pptx/lecture11_unsupervised.pptx
@@ -522,7 +522,7 @@
           <a:lstStyle/>
           <a:p>
             <a:r>
-              <a:t>Monday afternoon, Segment 4 hour two, straight on from Lecture 10's "your data, your metrics." Here is the uncomfortable truth for a clinical lab: most of your data is UNLABELED — thousands of QC runs, spectra, chromatograms nobody ever annotated. This hour is about what you can still learn without labels. Four stops: (1) autoencoders — compress then reconstruct, and use the reconstruction error as an anomaly / QC score; (2) VAEs, intuitively — points vs. clouds, told entirely in pictures with NO derivation; (3) self-supervised learning — how foundation models pretrain by letting the data label itself (masking, contrastive, DINO); (4) semi-supervised in one slide — the "10,000 unlabeled + 100 labeled" pseudo-labeling middle path. The topic is conceptual, so the one numeric beat is reconstruction error: an MSE by hand, then a normal-vs-anomaly decision against a threshold — a straight callback to Lecture 10's sensitivity/specificity choice. Same interactive spine as every lecture: each I-do is followed by a you-do that IS a Quiz 11 item. Hand out Quiz 11 now, blank; we hit all four items live — the two latent pictures (Q1), the four-way paradigm match (Q2), the reconstruction-error compute (Q3), and the DINO/contrastive "why must the views agree?" (Q4). Lab 4 next hour builds a VAE on real spectra, so everything here is the on-ramp.</a:t>
+              <a:t>Monday afternoon, Segment 4 hour two, straight on from Lecture 10's "your data, your metrics." Here is the uncomfortable truth for a clinical lab: most of your data is UNLABELED — thousands of QC runs, spectra, chromatograms nobody ever annotated. This hour is about what you can still learn without labels. Four stops: (1) autoencoders — compress then reconstruct, and use the reconstruction error as an anomaly / QC score; (2) VAEs, intuitively — points vs. clouds, told entirely in pictures with NO derivation; (3) self-supervised learning — how foundation models pretrain by letting the data label itself (masking, contrastive, DINO); (4) semi-supervised in one slide — the "10,000 unlabeled + 100 labeled" pseudo-labeling middle path. The topic is conceptual, so the one numeric beat is reconstruction error: an MSE by hand, then a normal-vs-anomaly decision against a threshold — a straight callback to Lecture 10's sensitivity/specificity choice. Same interactive spine as every lecture: each I-do is followed by a you-do that IS a Quiz 11 item. Hand out Quiz 11 now, blank; we hit all four items live — the two latent pictures (Q1), the four-way paradigm match (Q2), the reconstruction-error compute (Q3), and the DINO/contrastive safe-vs-corrupt augmentation call (Q4). Lab 4 next hour builds a VAE on real spectra, so everything here is the on-ramp.</a:t>
             </a:r>
           </a:p>
           <a:p/>
@@ -593,7 +593,7 @@
           <a:lstStyle/>
           <a:p>
             <a:r>
-              <a:t>The fun payoff and the clearest proof the cloud is smooth. Take two real spectra, A and B; encode each to its latent code; then walk a straight line between those two codes and decode a handful of stops along the way. The decoded spectra MORPH continuously — peaks slide in m/z and trade height as you move from A to B — a smooth interpolation, not an abrupt switch. The teaching point: this is only possible because the VAE's latent cloud is gap-free, so every intermediate point on the line is a valid, plausible spectrum. Try the same walk in a plain autoencoder's latent space and somewhere in the middle you cross an empty gap the decoder was never trained on, and out comes garbage. This is exactly the Lab 4 "fun payoff" cell — sample latent points and interpolate between two spectra — so it's a direct preview. 💬 DO-IT-TOGETHER (30 sec, to break the VAE stretch): walking stop 1 → stop 5, the LEFT peak SHRINKS — it starts tall at stop 1 (spectrum A) and is clearly lower by stop 5 (spectrum B), while the middle peak rises; that continuous trade of peak heights IS the smooth morph the gap-free cloud buys you. Take the call, then next slide the room makes the AE-vs-VAE identification itself (Quiz 11 Q1).</a:t>
+              <a:t>The fun payoff and the clearest proof the cloud is smooth. Take two real spectra, A and B; encode each to its latent code; then walk a straight line between those two codes and decode a handful of stops along the way. The decoded spectra MORPH continuously — peaks slide in m/z and trade height as you move from A to B — a smooth interpolation, not an abrupt switch. The teaching point: this is only possible because the VAE's latent cloud is gap-free, so every intermediate point on the line is a valid, plausible spectrum. Try the same walk in a plain autoencoder's latent space and somewhere in the middle you cross an empty gap the decoder was never trained on, and out comes garbage. This is exactly the Lab 4 "fun payoff" cell — sample latent points and interpolate between two spectra — so it's a direct preview. Next slide the room makes the AE-vs-VAE identification itself (Quiz 11 Q1).</a:t>
             </a:r>
           </a:p>
           <a:p/>
@@ -948,7 +948,7 @@
           <a:lstStyle/>
           <a:p>
             <a:r>
-              <a:t>The third self-supervised flavor and the one with the striking visual: DINO (self-DIstillation with NO labels, Caron et al. 2021). It runs on the same "two views must agree" principle as contrastive learning, packaged as a student and a teacher. Two augmented views of one input are fed to a STUDENT network and a TEACHER network; the student is trained so its output distribution MATCHES the teacher's on the same input. Where does the teacher come from with no labels? It IS the student — a slow moving average of the student's own weights — so the model teaches itself, which is why it's called self-distillation. The famous, almost eerie payoff (right panel): after this label-free pretraining, the model's ATTENTION spontaneously highlights the main object in an image — unsupervised segmentation, no masks or boxes ever provided. For us the message is the through-line of the whole self-supervised section: augmentation-invariance — make different views of the same thing agree — plus scale is enough to learn powerful, general features without labels, which is how modern foundation models pretrain (forward to Lecture 13). Next slide the room answers WHY the views must agree (Quiz 11 Q4).</a:t>
+              <a:t>The third self-supervised flavor and the one with the striking visual: DINO (self-DIstillation with NO labels, Caron et al. 2021). It runs on the same "two views must agree" principle as contrastive learning, packaged as a student and a teacher. Two augmented views of one input are fed to a STUDENT network and a TEACHER network; the student is trained so its output distribution MATCHES the teacher's on the same input. Where does the teacher come from with no labels? It IS the student — a slow moving average of the student's own weights — so the model teaches itself, which is why it's called self-distillation. The famous, almost eerie payoff (right panel): after this label-free pretraining, the model's ATTENTION spontaneously highlights the main object in an image — unsupervised segmentation, no masks or boxes ever provided. For us the message is the through-line of the whole self-supervised section: augmentation-invariance — make different views of the same thing agree — plus scale is enough to learn powerful, general features without labels, which is how modern foundation models pretrain (forward to Lecture 13). Next slide the room decides WHICH augmentation would corrupt this agreement — a spot-the-break DECIDE, not a definition restated (Quiz 11 Q4).</a:t>
             </a:r>
           </a:p>
           <a:p/>
@@ -1019,7 +1019,7 @@
           <a:lstStyle/>
           <a:p>
             <a:r>
-              <a:t>YOU-DO = Quiz 11 Q4 (the contrastive/DINO intuition; assesses the self-supervised outcome). Expected answer (any equivalent phrasing earns full credit): the two views differ only by nuisance augmentations — added noise, an m/z shift — while the underlying sample is identical, so forcing their embeddings to AGREE makes the model learn the stable, real content and IGNORE the nuisance variation (augmentation-invariance). A good extension: that invariance is exactly what you want for spectra, because the same sample on a different day or instrument should still land in the same place. And note the guardrail — the augmentations must preserve the biology; if a "view" changed the actual signal, forcing agreement would teach the model to ignore something real. Take one answer from the floor, then have them fill Q4. That's the third and fourth Quiz 11 items done — one more paradigm to name.</a:t>
+              <a:t>YOU-DO = Quiz 11 Q4 (a DECIDE beat, not "restate the definition": the room must spot which augmentation breaks the trick). Answer: (c) is CORRUPT; (a), (b), (d) are safe. The safe three add only the NUISANCE variation the SAME sample would show run-to-run — detector noise, a small m/z calibration drift, a global intensity rescale — so forcing those views to agree makes the model ignore the nuisance and keep the real content (augmentation-invariance, the whole point of contrastive/DINO). But (c) swaps in a GENUINELY DIFFERENT sample: forcing its embedding to match would teach the model to ignore real biological differences — it would treat two different patients as identical. The durable rule the beat lands: augmentations must preserve the underlying biology, or agreement teaches the model to throw away something real. Take one SAFE/CORRUPT call with its reason, then have them fill Q4 — that's the fourth Quiz 11 item; one more paradigm to name.</a:t>
             </a:r>
           </a:p>
           <a:p/>
@@ -1374,7 +1374,7 @@
           <a:lstStyle/>
           <a:p>
             <a:r>
-              <a:t>Recap = the Lecture 11 outcomes, each already exercised this hour and tied to a Quiz 11 item: the autoencoder + reconstruction-error compute (Q3), the AE-vs-VAE latent picture (Q1), the four-paradigm match (Q2), and the self-supervised "views must agree" intuition (Q4). The sheet was done across the hour, not as an end block — a distributed worksheet. Frame the takeaway: most lab data is unlabeled, and you now have a menu for it — reconstruct to denoise or flag anomalies, learn a smooth latent to sample and interpolate, let the data label itself to pretrain a body, or bridge a few labels to many with pseudo-labeling. Keep the sheet as the on-ramp to Lab 4.</a:t>
+              <a:t>Recap = the Lecture 11 outcomes, each already exercised this hour and tied to a Quiz 11 item: the autoencoder + reconstruction-error compute (Q3), the AE-vs-VAE latent picture (Q1), the four-paradigm match (Q2), and the self-supervised safe-vs-corrupt augmentation decide (Q4). The sheet was done across the hour, not as an end block — a distributed worksheet. Frame the takeaway: most lab data is unlabeled, and you now have a menu for it — reconstruct to denoise or flag anomalies, learn a smooth latent to sample and interpolate, let the data label itself to pretrain a body, or bridge a few labels to many with pseudo-labeling. Keep the sheet as the on-ramp to Lab 4.</a:t>
             </a:r>
           </a:p>
           <a:p/>
@@ -5267,8 +5267,8 @@
         </p:blipFill>
         <p:spPr>
           <a:xfrm>
-            <a:off x="3518240" y="1828800"/>
-            <a:ext cx="5125039" cy="2840736"/>
+            <a:off x="3050827" y="1828800"/>
+            <a:ext cx="6059865" cy="3358897"/>
           </a:xfrm>
           <a:prstGeom prst="rect">
             <a:avLst/>
@@ -5283,8 +5283,8 @@
         </p:nvSpPr>
         <p:spPr>
           <a:xfrm>
-            <a:off x="548640" y="4760976"/>
-            <a:ext cx="10515600" cy="1959864"/>
+            <a:off x="548640" y="5279137"/>
+            <a:ext cx="10515600" cy="1441703"/>
           </a:xfrm>
           <a:prstGeom prst="rect">
             <a:avLst/>
@@ -5334,7 +5334,7 @@
                 </a:solidFill>
                 <a:latin typeface="Avenir Next"/>
               </a:rPr>
-              <a:t>Pick two real spectra, A and B, find their latent codes, and walk a straight line between them. Decoding each stop gives a smooth MORPH — peaks slide and swap height from A into B. This only works because the VAE cloud is gap-free: every stop on the line is a valid, plausible spectrum. An AE's gaps would decode to garbage partway across.  💬 30 sec with your neighbor: walking stop 1 (A) → stop 5 (B), does the LEFT peak grow or shrink? (Answer in notes: it shrinks, 1.0 → 0.4, smoothly — every stop is a valid spectrum.)</a:t>
+              <a:t>Pick two real spectra, A and B, find their latent codes, and walk a straight line between them. Decoding each stop gives a smooth MORPH — peaks slide and swap height from A into B. This only works because the VAE cloud is gap-free: every stop on the line is a valid, plausible spectrum. An AE's gaps would decode to garbage partway across.</a:t>
             </a:r>
           </a:p>
         </p:txBody>
@@ -6532,7 +6532,7 @@
         <p:spPr>
           <a:xfrm>
             <a:off x="548640" y="731520"/>
-            <a:ext cx="11064240" cy="1005840"/>
+            <a:ext cx="11064240" cy="1127760"/>
           </a:xfrm>
           <a:prstGeom prst="rect">
             <a:avLst/>
@@ -6552,7 +6552,7 @@
                 </a:solidFill>
                 <a:latin typeface="Avenir Next"/>
               </a:rPr>
-              <a:t>Your turn — why must the two views agree?</a:t>
+              <a:t>Your turn — which augmentation would corrupt it?</a:t>
             </a:r>
           </a:p>
         </p:txBody>
@@ -6573,8 +6573,8 @@
         </p:blipFill>
         <p:spPr>
           <a:xfrm>
-            <a:off x="1666415" y="1828800"/>
-            <a:ext cx="8828689" cy="3840479"/>
+            <a:off x="2517753" y="1828800"/>
+            <a:ext cx="7126013" cy="3099816"/>
           </a:xfrm>
           <a:prstGeom prst="rect">
             <a:avLst/>
@@ -6589,8 +6589,8 @@
         </p:nvSpPr>
         <p:spPr>
           <a:xfrm>
-            <a:off x="548640" y="5760719"/>
-            <a:ext cx="10515600" cy="923544"/>
+            <a:off x="548640" y="5020056"/>
+            <a:ext cx="10515600" cy="1700784"/>
           </a:xfrm>
           <a:prstGeom prst="rect">
             <a:avLst/>
@@ -6640,7 +6640,7 @@
                 </a:solidFill>
                 <a:latin typeface="Avenir Next"/>
               </a:rPr>
-              <a:t>Your turn → Quiz 11, Q4. Two augmented views of the SAME spectrum are forced to land together. In one sentence: WHY must they agree — what does that force the model to learn? Worked answer in the notes.</a:t>
+              <a:t>Your turn → Quiz 11, Q4. Contrastive pretraining forces two augmented VIEWS of the same spectrum to land together. Three augmentations are fine, ONE corrupts it — mark each SAFE or CORRUPT: (a) add intensity noise · (b) shift m/z 0.2 Da · (c) swap in a DIFFERENT patient's spectrum · (d) scale intensities ×1.05. Which is corrupt, and what would forcing agreement then teach the model? Worked answer in the notes.</a:t>
             </a:r>
           </a:p>
         </p:txBody>
@@ -7718,7 +7718,7 @@
         <p:spPr>
           <a:xfrm>
             <a:off x="548640" y="1920240"/>
-            <a:ext cx="10789920" cy="3566159"/>
+            <a:ext cx="10789920" cy="3611880"/>
           </a:xfrm>
           <a:prstGeom prst="rect">
             <a:avLst/>
@@ -7737,7 +7737,7 @@
               </a:spcAft>
             </a:pPr>
             <a:r>
-              <a:rPr sz="2100" b="1" i="0">
+              <a:rPr sz="1900" b="1" i="0">
                 <a:solidFill>
                   <a:srgbClr val="0E7C7B"/>
                 </a:solidFill>
@@ -7746,7 +7746,7 @@
               <a:t>•  </a:t>
             </a:r>
             <a:r>
-              <a:rPr sz="2100" b="0" i="0">
+              <a:rPr sz="1900" b="0" i="0">
                 <a:solidFill>
                   <a:srgbClr val="1B2025"/>
                 </a:solidFill>
@@ -7762,7 +7762,7 @@
               </a:spcAft>
             </a:pPr>
             <a:r>
-              <a:rPr sz="2100" b="1" i="0">
+              <a:rPr sz="1900" b="1" i="0">
                 <a:solidFill>
                   <a:srgbClr val="0E7C7B"/>
                 </a:solidFill>
@@ -7771,7 +7771,7 @@
               <a:t>•  </a:t>
             </a:r>
             <a:r>
-              <a:rPr sz="2100" b="0" i="0">
+              <a:rPr sz="1900" b="0" i="0">
                 <a:solidFill>
                   <a:srgbClr val="1B2025"/>
                 </a:solidFill>
@@ -7787,7 +7787,7 @@
               </a:spcAft>
             </a:pPr>
             <a:r>
-              <a:rPr sz="2100" b="1" i="0">
+              <a:rPr sz="1900" b="1" i="0">
                 <a:solidFill>
                   <a:srgbClr val="0E7C7B"/>
                 </a:solidFill>
@@ -7796,7 +7796,7 @@
               <a:t>•  </a:t>
             </a:r>
             <a:r>
-              <a:rPr sz="2100" b="0" i="0">
+              <a:rPr sz="1900" b="0" i="0">
                 <a:solidFill>
                   <a:srgbClr val="1B2025"/>
                 </a:solidFill>
@@ -7812,7 +7812,7 @@
               </a:spcAft>
             </a:pPr>
             <a:r>
-              <a:rPr sz="2100" b="1" i="0">
+              <a:rPr sz="1900" b="1" i="0">
                 <a:solidFill>
                   <a:srgbClr val="0E7C7B"/>
                 </a:solidFill>
@@ -7821,13 +7821,13 @@
               <a:t>•  </a:t>
             </a:r>
             <a:r>
-              <a:rPr sz="2100" b="0" i="0">
+              <a:rPr sz="1900" b="0" i="0">
                 <a:solidFill>
                   <a:srgbClr val="1B2025"/>
                 </a:solidFill>
                 <a:latin typeface="Avenir Next"/>
               </a:rPr>
-              <a:t>Name the four paradigms and why self-supervised views must agree (Quiz 11 Q2 &amp; Q4) — and that semi-supervised pseudo-labeling exists</a:t>
+              <a:t>Name the four paradigms, and spot which augmentation would corrupt self-supervised pretraining — augmentations must preserve the biology (Quiz 11 Q2 &amp; Q4)</a:t>
             </a:r>
           </a:p>
         </p:txBody>
@@ -7882,7 +7882,7 @@
                 </a:solidFill>
                 <a:latin typeface="Avenir Next"/>
               </a:rPr>
-              <a:t>You have now worked every item on Quiz 11 live — the reconstruction-error compute (Q3), the two latent pictures (Q1), the four-way paradigm match (Q2), and the DINO/contrastive 'why agree?' (Q4). Keep the sheet — Lab 4 builds a VAE on real spectra.</a:t>
+              <a:t>You have now worked every item on Quiz 11 live — the reconstruction-error compute (Q3), the two latent pictures (Q1), the four-way paradigm match (Q2), and the safe-vs-corrupt augmentation call (Q4). Keep the sheet — Lab 4 builds a VAE on real spectra.</a:t>
             </a:r>
           </a:p>
         </p:txBody>

--- a/slides/pptx/lecture11_unsupervised.pptx
+++ b/slides/pptx/lecture11_unsupervised.pptx
@@ -522,7 +522,7 @@
           <a:lstStyle/>
           <a:p>
             <a:r>
-              <a:t>Monday afternoon, Segment 4 hour two, straight on from Lecture 10's "your data, your metrics." Here is the uncomfortable truth for a clinical lab: most of your data is UNLABELED — thousands of QC runs, spectra, chromatograms nobody ever annotated. This hour is about what you can still learn without labels. Four stops: (1) autoencoders — compress then reconstruct, and use the reconstruction error as an anomaly / QC score; (2) VAEs, intuitively — points vs. clouds, told entirely in pictures with NO derivation; (3) self-supervised learning — how foundation models pretrain by letting the data label itself (masking, contrastive, DINO); (4) semi-supervised in one slide — the "10,000 unlabeled + 100 labeled" pseudo-labeling middle path. The topic is conceptual, so the one numeric beat is reconstruction error: an MSE by hand, then a normal-vs-anomaly decision against a threshold — a straight callback to Lecture 10's sensitivity/specificity choice. Same interactive spine as every lecture: each I-do is followed by a you-do that IS a Quiz 11 item. Hand out Quiz 11 now, blank; we hit all four items live — the two latent pictures (Q1), the four-way paradigm match (Q2), the reconstruction-error compute (Q3), and the DINO/contrastive safe-vs-corrupt augmentation call (Q4). Lab 4 next hour builds a VAE on real spectra, so everything here is the on-ramp.</a:t>
+              <a:t>Monday afternoon, Segment 4 hour two, straight on from Lecture 10's "your data, your metrics." Here is the uncomfortable truth for a clinical lab: most of your data is UNLABELED — thousands of QC runs, spectra, chromatograms nobody ever annotated. This hour is about what you can still learn without labels. Four stops: (1) autoencoders — compress then reconstruct, and use the reconstruction error as an anomaly / QC score; (2) VAEs, intuitively — points vs. clouds, told entirely in pictures with NO derivation; (3) self-supervised learning — how foundation models pretrain by letting the data label itself (masking, contrastive, DINO); (4) semi-supervised in one slide — the "10,000 unlabeled + 100 labeled" pseudo-labeling middle path. The topic is conceptual, so the one numeric beat is reconstruction error: an MSE by hand, then a normal-vs-anomaly decision against a threshold — a straight callback to Lecture 10's sensitivity/specificity choice. Same interactive spine as every lecture: each I-do is followed by a you-do that IS a Quiz 11 item. Hand out Quiz 11 now, blank; we hit all four items live — sample-the-latent (Q1), the semi-supervised decision (Q2), the reconstruction-error trap (Q3), and the DINO/contrastive safe-vs-corrupt augmentation call (Q4). Lab 4 next hour builds a VAE on real spectra, so everything here is the on-ramp.</a:t>
             </a:r>
           </a:p>
           <a:p/>
@@ -593,7 +593,7 @@
           <a:lstStyle/>
           <a:p>
             <a:r>
-              <a:t>The fun payoff and the clearest proof the cloud is smooth. Take two real spectra, A and B; encode each to its latent code; then walk a straight line between those two codes and decode a handful of stops along the way. The decoded spectra MORPH continuously — peaks slide in m/z and trade height as you move from A to B — a smooth interpolation, not an abrupt switch. The teaching point: this is only possible because the VAE's latent cloud is gap-free, so every intermediate point on the line is a valid, plausible spectrum. Try the same walk in a plain autoencoder's latent space and somewhere in the middle you cross an empty gap the decoder was never trained on, and out comes garbage. This is exactly the Lab 4 "fun payoff" cell — sample latent points and interpolate between two spectra — so it's a direct preview. Next slide the room makes the AE-vs-VAE identification itself (Quiz 11 Q1).</a:t>
+              <a:t>Use MNIST as a brief, vivid bridge (rule 2) before mapping straight back to spectra. Why digits: everyone reads them instantly, so the smoothness of a VAE latent is impossible to miss. LEFT — the latent MANIFOLD: decode a grid of latent points (z1, z2) and you get a continuous sheet of digits that morph into their neighbours with no holes; that is the "one smooth, organized, gap-free cloud" from two slides ago, now literally visible. RIGHT — the INTERPOLATION: take two real digits, encode each to its latent code, walk a straight line between the codes, and decode the stops — a 3 slides smoothly into an 8, a 7 into a 1, every intermediate a valid digit. That is only possible because the cloud is gap-free; the same walk in a plain autoencoder's latent would cross an empty gap and decode to garbage. Now map it back to mass spec, which is the whole point: on a VAE trained on spectra you can SAMPLE a latent point to get a brand-new plausible spectrum, and INTERPOLATE between two real spectra to watch peaks slide and trade height — exactly the Lab 4 "fun payoff" cell. Next slide the room makes the AE-vs-VAE call itself (Quiz 11 Q1).</a:t>
             </a:r>
           </a:p>
           <a:p/>
@@ -664,7 +664,7 @@
           <a:lstStyle/>
           <a:p>
             <a:r>
-              <a:t>YOU-DO = Quiz 11 Q1 (tell an AE latent from a VAE latent in a picture — the VAE outcome, assessed). Answer: PICTURE B is the VAE. One-sentence justification (any equivalent): B is one smooth, organized, gap-free cloud where every point decodes to a plausible spectrum, whereas Picture A is scattered islands with big empty gaps that would decode to garbage — the autoencoder. Run the 💬 pair prompt from the outcomes: which map would you trust to flag a NOVEL contaminant? The VAE cloud (B) — a genuinely new spectrum lands OUTSIDE the tidy cloud (high reconstruction error, easy to flag), while the AE's gaps make "far from training data" ambiguous. Both pictures are reproduced verbatim on the Quiz 11 sheet, so the room answers straight off this slide. Take one answer with its reason, then have them fill Q1.</a:t>
+              <a:t>YOU-DO = Quiz 11 Q1 (upgraded from 'identify the picture' to 'predict what sampling does'). (a) Picture A is the autoencoder: scattered islands with big empty GAPS, so a random sample usually lands in a gap the decoder never trained on and decodes to GARBAGE — a non-physical spectrum. (b) Picture B is the VAE: one smooth, gap-free cloud, so every sampled point decodes to a PLAUSIBLE spectrum. (c) B is the VAE, and it is the one you use to generate (or interpolate) — only a gap-free latent is safe to sample. Good extension (the old pair prompt): B is also the map you trust to flag a NOVEL contaminant, because a genuinely new spectrum lands OUTSIDE the tidy cloud (high reconstruction error, easy to flag) while the AE's gaps make 'far from training data' ambiguous. Both pictures are on the Quiz 11 sheet, so the room answers straight off this slide. Take the sampling prediction with its reason, then have them fill Q1.</a:t>
             </a:r>
           </a:p>
           <a:p/>
@@ -1161,7 +1161,7 @@
           <a:lstStyle/>
           <a:p>
             <a:r>
-              <a:t>The single chart the Q2 four-way match is answerable from (rule 3). Walk the four rows by the ONE question that decides each: what data do you have? SUPERVISED — you have many LABELED examples, so learn a direct input→label map (every lecture so far; e.g. labeled spectra → resistant/susceptible). UNSUPERVISED — you have NO labels, so find structure or score anomalies (today's autoencoder flagging bad QC runs; clustering). SELF-SUPERVISED — no labels either, but the DATA LABELS ITSELF via a pretext task that pretrains a general body (mask peaks and predict, then fine-tune) — the foundation-model recipe. SEMI-SUPERVISED — you have FEW labels plus MANY unlabeled, so pseudo-label the rest and retrain. I-do one row aloud — the autoencoder QC case is unsupervised — then the room matches four scenarios off this same chart next slide (Quiz 11 Q2).</a:t>
+              <a:t>The single chart the Q2 decision is read off (rule 3). Walk the four rows by the ONE question that decides each: what data do you have? SUPERVISED — you have many LABELED examples, so learn a direct input→label map (every lecture so far; e.g. labeled spectra → resistant/susceptible). UNSUPERVISED — you have NO labels, so find structure or score anomalies (today's autoencoder flagging bad QC runs; clustering). SELF-SUPERVISED — no labels either, but the DATA LABELS ITSELF via a pretext task that pretrains a general body (mask peaks and predict, then fine-tune) — the foundation-model recipe. SEMI-SUPERVISED — you have FEW labels plus MANY unlabeled, so pseudo-label the rest and retrain. I-do one row aloud — the autoencoder QC case is unsupervised — then the room reads ONE realistic scenario off this same chart next slide (Quiz 11 Q2).</a:t>
             </a:r>
           </a:p>
           <a:p/>
@@ -1232,7 +1232,7 @@
           <a:lstStyle/>
           <a:p>
             <a:r>
-              <a:t>YOU-DO = Quiz 11 Q2 (match four lab scenarios to the four paradigms; each used once). Straight off the chart: (a) 3,000 spectra each carrying an S/R label, train a classifier → SUPERVISED (labels in hand, learn input→label). (b) 50,000 unlabeled QC runs, flag the abnormal ones → UNSUPERVISED (no labels; an autoencoder's reconstruction error scores anomalies — today's first half). (c) pretrain on millions of UNLABELED spectra by masking peaks and predicting them, then fine-tune on your few labels → SELF-SUPERVISED (the data labels itself via a pretext task). (d) 100 labeled + 10,000 unlabeled, use the model to label the rest and retrain → SEMI-SUPERVISED (pseudo-labeling, the middle path). Each paradigm used exactly once; identical to the Quiz 11 Q2 key. Take one match from the floor, confirm against the chart, then have them fill Q2 — that's all four Quiz 11 items worked live.</a:t>
+              <a:t>YOU-DO = Quiz 11 Q2 (upgraded from a four-way lookup to one real decision off the chart). (a) SEMI-SUPERVISED — a FEW labels plus MANY unlabeled, the middle-path row. (b) PSEUDO-LABELING: train a first model on the 300 labeled, predict on the 40,000 unlabeled, KEEP only the confident predictions as pseudo-labels, retrain on the combined set (optionally repeat). (c) The failure mode: confident-but-WRONG pseudo-labels reinforce the model's own mistakes, so the confidence filter matters and a weak early model can poison the pool. Note why the alternatives waste data: pure supervised throws away 40,000 runs; pure unsupervised ignores the 300 labels you paid for. Take the paradigm + technique + risk from the floor, then have them fill Q2 — that's all four Quiz 11 items worked live.</a:t>
             </a:r>
           </a:p>
           <a:p/>
@@ -1303,7 +1303,7 @@
           <a:lstStyle/>
           <a:p>
             <a:r>
-              <a:t>Signpost the four stops so the room can pace itself. Nothing here needs new math: the only arithmetic all hour is one mean-squared-error, computed by hand, which most of this room already knows from assay QC. Everything is anchored to mass-spec: an autoencoder that flags a bad run, a latent map of your spectra, a VAE that morphs one spectrum into another, a model that pretrains by masking peaks. The back half — self-supervised learning — is the "how do the big foundation models actually learn without labels" story, a callback to Lecture 8's BERT and a preview of Lecture 13. Aim for a hands-on beat about every 8–10 minutes; the compute beat is Q3 (reconstruction error), the rest are read-the-picture you-dos.</a:t>
+              <a:t>Signpost the four stops so the room can pace itself. Nothing here needs new math: the only arithmetic all hour is one mean-squared-error, computed by hand, which most of this room already knows from assay QC. Everything is anchored to mass-spec: an autoencoder that flags a bad run, a latent map of your spectra, a VAE that morphs one spectrum into another, a model that pretrains by masking peaks. The back half — self-supervised learning — is the "how do the big foundation models actually learn without labels" story, a callback to Lecture 8's BERT and a preview of Lecture 13. Aim for a hands-on beat about every 8–10 minutes; the compute beat is Q3 (reconstruction error) framed as a trap; the rest are predict/decide you-dos.</a:t>
             </a:r>
           </a:p>
           <a:p/>
@@ -1374,7 +1374,7 @@
           <a:lstStyle/>
           <a:p>
             <a:r>
-              <a:t>Recap = the Lecture 11 outcomes, each already exercised this hour and tied to a Quiz 11 item: the autoencoder + reconstruction-error compute (Q3), the AE-vs-VAE latent picture (Q1), the four-paradigm match (Q2), and the self-supervised safe-vs-corrupt augmentation decide (Q4). The sheet was done across the hour, not as an end block — a distributed worksheet. Frame the takeaway: most lab data is unlabeled, and you now have a menu for it — reconstruct to denoise or flag anomalies, learn a smooth latent to sample and interpolate, let the data label itself to pretrain a body, or bridge a few labels to many with pseudo-labeling. Keep the sheet as the on-ramp to Lab 4.</a:t>
+              <a:t>Recap = the Lecture 11 outcomes, each already exercised this hour and tied to a Quiz 11 item: the reconstruction-error trap (Q3), the sample-the-latent prediction (Q1), the semi-supervised decision (Q2), and the self-supervised safe-vs-corrupt augmentation decide (Q4). The sheet was done across the hour, not as an end block — a distributed worksheet. Frame the takeaway: most lab data is unlabeled, and you now have a menu for it — reconstruct to denoise or flag anomalies, learn a smooth latent to sample and interpolate, let the data label itself to pretrain a body, or bridge a few labels to many with pseudo-labeling. Keep the sheet as the on-ramp to Lab 4.</a:t>
             </a:r>
           </a:p>
           <a:p/>
@@ -1800,7 +1800,7 @@
           <a:lstStyle/>
           <a:p>
             <a:r>
-              <a:t>YOU-DO = Quiz 11 Q3 (the same MSE-then-threshold skill, new numbers; this is the hour's compute beat and it assesses the reconstruction-error outcome). Work it exactly: bin 1, 0.1 − 0.1 = 0, squared 0; bin 2, 0.8 − 0.5 = 0.3, squared 0.09; bin 3, 0.2 − 0.2 = 0, squared 0. Sum of squared errors = 0.09; MSE = 0.09 / 3 = 0.03. Decision against the stated threshold 0.01: 0.03 &gt; 0.01 → ANOMALY, flag the run. Every number is exact and identical to the Quiz 11 Q3 figure and answer key. Contrast it with the I-do: same formula, but this run's single big mismatch (0.8 measured vs 0.5 rebuilt) pushes the error over the line. Take the MSE from the floor, confirm the call, then have them fill Q3.</a:t>
+              <a:t>YOU-DO = Quiz 11 Q3 (upgraded from a plug-in to a real trap that ends in a surprising answer). (a) MSE = 0.40 / 20 = 0.02. (b) 0.02 &lt; 0.05, so the MEAN says PASS — it MISSES the contaminant. (c) The mean divides one big error across 20 bins, so a LOCALIZED spike gets diluted below threshold; the fix is to look at the MAX per-bin error (0.40 &gt; 0.05 → flag) or the error inside the peak window. This is the anomaly-overlay slide made quantitative: a contaminant is a localized gap, and a mean over thousands of bins can wash it out. Tie it to Lecture 10 — lowering the flag threshold or switching to max-error is the sensitivity/specificity dial. Take the MSE and the (surprising) decision from the floor, then have them fill Q3.</a:t>
             </a:r>
           </a:p>
           <a:p/>
@@ -5212,7 +5212,7 @@
                 </a:solidFill>
                 <a:latin typeface="Menlo"/>
               </a:rPr>
-              <a:t>VAES · INTERPOLATION · I-DO</a:t>
+              <a:t>VAES · A SMOOTH LATENT (MNIST) · I-DO</a:t>
             </a:r>
           </a:p>
         </p:txBody>
@@ -5246,14 +5246,14 @@
                 </a:solidFill>
                 <a:latin typeface="Avenir Next"/>
               </a:rPr>
-              <a:t>Walk a line → one spectrum morphs into another</a:t>
+              <a:t>A smooth latent plane: walk a line, watch it morph</a:t>
             </a:r>
           </a:p>
         </p:txBody>
       </p:sp>
       <p:pic>
         <p:nvPicPr>
-          <p:cNvPr id="5" name="Picture 4" descr="fig_latent_interp.png"/>
+          <p:cNvPr id="5" name="Picture 4" descr="fig_mnist_latent.png"/>
           <p:cNvPicPr>
             <a:picLocks noChangeAspect="1"/>
           </p:cNvPicPr>
@@ -5267,8 +5267,8 @@
         </p:blipFill>
         <p:spPr>
           <a:xfrm>
-            <a:off x="3050827" y="1828800"/>
-            <a:ext cx="6059865" cy="3358897"/>
+            <a:off x="3137611" y="1828800"/>
+            <a:ext cx="5886297" cy="2596896"/>
           </a:xfrm>
           <a:prstGeom prst="rect">
             <a:avLst/>
@@ -5277,14 +5277,49 @@
       </p:pic>
       <p:sp>
         <p:nvSpPr>
-          <p:cNvPr id="6" name="Rectangle 5"/>
+          <p:cNvPr id="6" name="TextBox 5"/>
+          <p:cNvSpPr txBox="1"/>
+          <p:nvPr/>
+        </p:nvSpPr>
+        <p:spPr>
+          <a:xfrm>
+            <a:off x="548640" y="4480560"/>
+            <a:ext cx="11064240" cy="411480"/>
+          </a:xfrm>
+          <a:prstGeom prst="rect">
+            <a:avLst/>
+          </a:prstGeom>
+          <a:noFill/>
+        </p:spPr>
+        <p:txBody>
+          <a:bodyPr wrap="square" anchor="t">
+            <a:spAutoFit/>
+          </a:bodyPr>
+          <a:lstStyle/>
+          <a:p>
+            <a:pPr algn="ctr"/>
+            <a:r>
+              <a:rPr sz="1200" b="0" i="1">
+                <a:solidFill>
+                  <a:srgbClr val="8A9099"/>
+                </a:solidFill>
+                <a:latin typeface="Avenir Next"/>
+              </a:rPr>
+              <a:t>2-D-latent VAE trained on MNIST (public-domain digits) — a vivid bridge; the same trick runs on spectra in Lab 4</a:t>
+            </a:r>
+          </a:p>
+        </p:txBody>
+      </p:sp>
+      <p:sp>
+        <p:nvSpPr>
+          <p:cNvPr id="7" name="Rectangle 6"/>
           <p:cNvSpPr/>
           <p:nvPr/>
         </p:nvSpPr>
         <p:spPr>
           <a:xfrm>
-            <a:off x="548640" y="5279137"/>
-            <a:ext cx="10515600" cy="1441703"/>
+            <a:off x="548640" y="4983480"/>
+            <a:ext cx="10515600" cy="1700784"/>
           </a:xfrm>
           <a:prstGeom prst="rect">
             <a:avLst/>
@@ -5334,7 +5369,7 @@
                 </a:solidFill>
                 <a:latin typeface="Avenir Next"/>
               </a:rPr>
-              <a:t>Pick two real spectra, A and B, find their latent codes, and walk a straight line between them. Decoding each stop gives a smooth MORPH — peaks slide and swap height from A into B. This only works because the VAE cloud is gap-free: every stop on the line is a valid, plausible spectrum. An AE's gaps would decode to garbage partway across.</a:t>
+              <a:t>Digits make the idea unmissable. A VAE packs all of MNIST into ONE smooth latent plane (left) — nearby points are similar digits, with NO gaps. Pick two real digits and walk the straight line between their codes (right): a 3 morphs smoothly into an 8, every stop a real digit. Same trick on SPECTRA (Lab 4): sample a latent point → a new plausible spectrum; walk A→B → a smooth spectral morph. An AE's gaps would decode to garbage partway across.</a:t>
             </a:r>
           </a:p>
         </p:txBody>
@@ -5430,7 +5465,7 @@
                 </a:solidFill>
                 <a:latin typeface="Menlo"/>
               </a:rPr>
-              <a:t>VAES · YOUR TURN (YOU-DO = Q1) · 💬 PAIR</a:t>
+              <a:t>VAES · YOUR TURN (YOU-DO = Q1)</a:t>
             </a:r>
           </a:p>
         </p:txBody>
@@ -5444,7 +5479,7 @@
         <p:spPr>
           <a:xfrm>
             <a:off x="548640" y="731520"/>
-            <a:ext cx="11064240" cy="1005840"/>
+            <a:ext cx="11064240" cy="1127760"/>
           </a:xfrm>
           <a:prstGeom prst="rect">
             <a:avLst/>
@@ -5464,7 +5499,7 @@
                 </a:solidFill>
                 <a:latin typeface="Avenir Next"/>
               </a:rPr>
-              <a:t>Which picture is the VAE?</a:t>
+              <a:t>Your turn — sample each latent: what comes out?</a:t>
             </a:r>
           </a:p>
         </p:txBody>
@@ -5485,8 +5520,8 @@
         </p:blipFill>
         <p:spPr>
           <a:xfrm>
-            <a:off x="1963667" y="1828800"/>
-            <a:ext cx="8234186" cy="3877056"/>
+            <a:off x="2513906" y="1828800"/>
+            <a:ext cx="7133707" cy="3358897"/>
           </a:xfrm>
           <a:prstGeom prst="rect">
             <a:avLst/>
@@ -5501,8 +5536,8 @@
         </p:nvSpPr>
         <p:spPr>
           <a:xfrm>
-            <a:off x="548640" y="5797296"/>
-            <a:ext cx="10515600" cy="923544"/>
+            <a:off x="548640" y="5279137"/>
+            <a:ext cx="10515600" cy="1441703"/>
           </a:xfrm>
           <a:prstGeom prst="rect">
             <a:avLst/>
@@ -5552,7 +5587,7 @@
                 </a:solidFill>
                 <a:latin typeface="Avenir Next"/>
               </a:rPr>
-              <a:t>Your turn → Quiz 11, Q1. Two latent maps of the same spectra. Which one is the VAE — and justify in ONE sentence. 💬 With your neighbor: which map would you trust to flag a NOVEL contaminant, and why? Worked answer in the notes.</a:t>
+              <a:t>Your turn → Quiz 11, Q1. You want to GENERATE synthetic resistant spectra to augment training, so you sample random latent points and decode. (a) From Picture A (scattered islands with gaps), what comes out — and why? (b) From Picture B (one smooth cloud)? (c) Which is the VAE, and which latent do you use to generate? Worked answer in the notes.</a:t>
             </a:r>
           </a:p>
         </p:txBody>
@@ -7197,14 +7232,14 @@
                 </a:solidFill>
                 <a:latin typeface="Avenir Next"/>
               </a:rPr>
-              <a:t>Your turn — match four scenarios</a:t>
+              <a:t>Your turn — 300 labeled, 40,000 unlabeled</a:t>
             </a:r>
           </a:p>
         </p:txBody>
       </p:sp>
       <p:pic>
         <p:nvPicPr>
-          <p:cNvPr id="5" name="Picture 4" descr="fig_paradigm_youdo.png"/>
+          <p:cNvPr id="5" name="Picture 4" descr="fig_semisup_youdo.png"/>
           <p:cNvPicPr>
             <a:picLocks noChangeAspect="1"/>
           </p:cNvPicPr>
@@ -7218,8 +7253,8 @@
         </p:blipFill>
         <p:spPr>
           <a:xfrm>
-            <a:off x="2612872" y="1828800"/>
-            <a:ext cx="6935775" cy="3358897"/>
+            <a:off x="1408097" y="1828800"/>
+            <a:ext cx="9345325" cy="3617976"/>
           </a:xfrm>
           <a:prstGeom prst="rect">
             <a:avLst/>
@@ -7234,8 +7269,8 @@
         </p:nvSpPr>
         <p:spPr>
           <a:xfrm>
-            <a:off x="548640" y="5279137"/>
-            <a:ext cx="10515600" cy="1441703"/>
+            <a:off x="548640" y="5538216"/>
+            <a:ext cx="10515600" cy="1182624"/>
           </a:xfrm>
           <a:prstGeom prst="rect">
             <a:avLst/>
@@ -7285,7 +7320,7 @@
                 </a:solidFill>
                 <a:latin typeface="Avenir Next"/>
               </a:rPr>
-              <a:t>Your turn → Quiz 11, Q2. Match each scenario to ONE paradigm (each used once): (a) 3,000 spectra each labeled S/R, train a classifier; (b) 50,000 unlabeled runs, flag the abnormal ones; (c) pretrain on millions of unlabeled spectra by masking peaks, then fine-tune; (d) 100 labeled + 10,000 unlabeled, label the rest and retrain. Worked answer in the notes.</a:t>
+              <a:t>Your turn → Quiz 11, Q2. You have 300 labeled spectra (S/R known) and 40,000 unlabeled QC runs, and you want a resistance classifier. (a) Which paradigm uses ALL your data? (b) Name the specific technique. (c) What's the one failure mode to watch? Worked answer in the notes.</a:t>
             </a:r>
           </a:p>
         </p:txBody>
@@ -7777,7 +7812,7 @@
                 </a:solidFill>
                 <a:latin typeface="Avenir Next"/>
               </a:rPr>
-              <a:t>Compute a reconstruction error (MSE) and turn it into a normal-vs-anomaly QC call against a threshold (Quiz 11 Q3)</a:t>
+              <a:t>Compute a reconstruction error (MSE), decide against a threshold, and see how a MEAN can miss a localized contaminant (Quiz 11 Q3)</a:t>
             </a:r>
           </a:p>
           <a:p>
@@ -7802,7 +7837,7 @@
                 </a:solidFill>
                 <a:latin typeface="Avenir Next"/>
               </a:rPr>
-              <a:t>Tell an AE latent from a VAE latent in a picture, and say why a VAE can sample and interpolate (Quiz 11 Q1)</a:t>
+              <a:t>Predict what sampling each latent decodes to, and say why only a gap-free VAE latent is safe to sample and interpolate (Quiz 11 Q1)</a:t>
             </a:r>
           </a:p>
           <a:p>
@@ -7882,7 +7917,7 @@
                 </a:solidFill>
                 <a:latin typeface="Avenir Next"/>
               </a:rPr>
-              <a:t>You have now worked every item on Quiz 11 live — the reconstruction-error compute (Q3), the two latent pictures (Q1), the four-way paradigm match (Q2), and the safe-vs-corrupt augmentation call (Q4). Keep the sheet — Lab 4 builds a VAE on real spectra.</a:t>
+              <a:t>You have now worked every item on Quiz 11 live — the reconstruction-error trap (Q3), the sample-the-latent call (Q1), the semi-supervised decision (Q2), and the safe-vs-corrupt augmentation call (Q4). Keep the sheet — Lab 4 builds a VAE on real spectra.</a:t>
             </a:r>
           </a:p>
         </p:txBody>
@@ -9207,7 +9242,7 @@
         <p:spPr>
           <a:xfrm>
             <a:off x="548640" y="731520"/>
-            <a:ext cx="11064240" cy="1005840"/>
+            <a:ext cx="11064240" cy="1127760"/>
           </a:xfrm>
           <a:prstGeom prst="rect">
             <a:avLst/>
@@ -9227,14 +9262,14 @@
                 </a:solidFill>
                 <a:latin typeface="Avenir Next"/>
               </a:rPr>
-              <a:t>Your turn — compute the error, make the call</a:t>
+              <a:t>Your turn — does the mean catch a contaminant?</a:t>
             </a:r>
           </a:p>
         </p:txBody>
       </p:sp>
       <p:pic>
         <p:nvPicPr>
-          <p:cNvPr id="5" name="Picture 4" descr="fig_recon_error_youdo.png"/>
+          <p:cNvPr id="5" name="Picture 4" descr="fig_recon_trap_youdo.png"/>
           <p:cNvPicPr>
             <a:picLocks noChangeAspect="1"/>
           </p:cNvPicPr>
@@ -9248,8 +9283,8 @@
         </p:blipFill>
         <p:spPr>
           <a:xfrm>
-            <a:off x="1820259" y="1828800"/>
-            <a:ext cx="8521002" cy="3877055"/>
+            <a:off x="2061567" y="1828800"/>
+            <a:ext cx="8038385" cy="3358897"/>
           </a:xfrm>
           <a:prstGeom prst="rect">
             <a:avLst/>
@@ -9264,8 +9299,8 @@
         </p:nvSpPr>
         <p:spPr>
           <a:xfrm>
-            <a:off x="548640" y="5797295"/>
-            <a:ext cx="10515600" cy="923544"/>
+            <a:off x="548640" y="5279137"/>
+            <a:ext cx="10515600" cy="1441703"/>
           </a:xfrm>
           <a:prstGeom prst="rect">
             <a:avLst/>
@@ -9315,7 +9350,7 @@
                 </a:solidFill>
                 <a:latin typeface="Avenir Next"/>
               </a:rPr>
-              <a:t>Your turn → Quiz 11, Q3. Same formula, new numbers: x = (0.1, 0.8, 0.2), x̂ = (0.1, 0.5, 0.2), threshold 0.01. Compute each squared error, then the MSE, then decide: normal or anomaly? Worked answer in the notes.</a:t>
+              <a:t>Your turn → Quiz 11, Q3. A contaminant spikes ONE m/z bin out of 20; that bin's squared error is 0.40, the other 19 are 0. (a) Compute the MEAN MSE over all 20 bins. (b) With threshold 0.05, does mean-MSE FLAG the run? (c) It doesn't — why does averaging hide a sharp contaminant, and what single number WOULD catch it? Worked answer in the notes.</a:t>
             </a:r>
           </a:p>
         </p:txBody>
